--- a/docs/presentation/presentation.pptx
+++ b/docs/presentation/presentation.pptx
@@ -120,7 +120,7 @@
   <p:extLst>
     <p:ext uri="{521415D9-36F7-43E2-AB2F-B90AF26B5E84}">
       <p14:sectionLst xmlns:p14="http://schemas.microsoft.com/office/powerpoint/2010/main">
-        <p14:section name="Основная часть" id="{bfc5d455-97a0-4fe1-bcf2-3efdf24d850e}">
+        <p14:section name="Основная часть" id="{e9f6c7ee-60ce-1cc8-34ec-98e4e497c359}">
           <p14:sldIdLst>
             <p14:sldId id="256"/>
             <p14:sldId id="257"/>
@@ -130,7 +130,7 @@
             <p14:sldId id="261"/>
           </p14:sldIdLst>
         </p14:section>
-        <p14:section name="Резерв" id="{4f516de1-1908-a0e0-4561-4dfcdb661fbb}">
+        <p14:section name="Резерв" id="{0503edf5-8ec5-5bb3-4522-79d9e1d832e5}">
           <p14:sldIdLst>
             <p14:sldId id="262"/>
             <p14:sldId id="263"/>
@@ -546,7 +546,7 @@
           <a:p>
             <a:r>
               <a:rPr lang="en-US" dirty="0"/>
-              <a:t>0:00–0:15 (15 с). Мы — [команда], я [имя]. Наш помощник по документообороту: сотрудник пишет задачу своими словами, помощник находит пункт Инструкции с процентом релевантности, объясняет простыми словами и помогает сделать документ. Всё работает локально. Сразу покажу вживую — переключаемся на слайд с QR.</a:t>
+              <a:t>0:00–0:17. Здравствуйте! Мы — команда [Название команды]. Мы сделали помощника по документообороту: сотрудник пишет задачу своими словами, а помощник находит нужный пункт Инструкции, объясняет его простыми словами и помогает сразу сделать документ. Всё работает локально, без внешних сервисов.</a:t>
             </a:r>
             <a:endParaRPr lang="en-US" dirty="0"/>
           </a:p>
@@ -1074,7 +1074,7 @@
           <a:p>
             <a:r>
               <a:rPr lang="en-US" dirty="0"/>
-              <a:t>0:15–0:25 (10 с). Помощник доступен по этому QR-коду — можно открыть с телефона прямо сейчас. Справа — вопросы, которые можно задать как в мессенджере, с опечатками. Переключаюсь в браузер: показываю на этом же стенде.</a:t>
+              <a:t>0:17–0:35. Помощник уже работает на нашем стенде — его можно открыть по этому QR-коду с телефона. Спрашивать можно так, как пишут коллеге в мессенджер: например, «скока дней на согласавание приказа» или «если отправлю распоряжение на согласавание сегодня, когда будет готово?».</a:t>
             </a:r>
             <a:endParaRPr lang="en-US" dirty="0"/>
           </a:p>
@@ -1162,7 +1162,7 @@
           <a:p>
             <a:r>
               <a:rPr lang="en-US" dirty="0"/>
-              <a:t>0:25–2:30 (2 мин 05 с) — живая демонстрация, слайд остаётся как подсказка порядка. 1) «скока дней на согласавание приказа» — опечатка исправлена, 10 рабочих дней по п. 10.3 (20 с). 2) «какая зарплата у главного специалиста?» — честный отказ и куда обратиться (15 с). 3) «сколько дней на согласование?» → кнопка «распоряжение» → «а для приказа?» (25 с). 4) «нужно подготовить распоряжение о создании рабочей группы» — модуль, согласующие, первый вопрос; затем заранее пройденная вкладка: отказ на «15 декабря» и готовый .docx (45 с). 5) «если отправлю распоряжение на согласавание сегодня когда будет готово?» — дата по календарю; при запасе времени — телефон с меню (20 с). Если стенд завис — скриншоты в docs/presentation/images и видео из релиза.</a:t>
+              <a:t>0:35–1:52. Вот пять сценариев, которые мы проверили на стенде. Первый — вопрос своими словами, с опечатками. На экране реальный ответ на вопрос «кагда регистрировать входящий документ»: помощник исправил опечатку, нашёл пункт пять шесть с релевантностью сто процентов и объяснил его простыми словами, а ниже дал дословную цитату и источник с редакцией и датой. Второй — вопрос, ответа на который в документах нет, например про зарплату. Помощник не выдумывает: он честно отказывает и подсказывает, куда обратиться. Третий — неполный вопрос «сколько дней на согласование?». Срок зависит от вида документа, поэтому помощник задаёт один уточняющий вопрос с кнопками. Распоряжение — три рабочих дня, а на короткое «а для приказа?» он отвечает с учётом контекста: десять. Четвёртый — рабочая задача: подготовить распоряжение о создании рабочей группы. Помощник подбирает модуль, называет согласующих по Матрице, задаёт вопросы по полям, проверяет формат ответов и выдаёт готовый файл .docx с чек-листом требований. Пятый — сроки датами: помощник берёт срок из Инструкции и считает крайнюю дату по производственному календарю, без выходных и праздников. Ещё он проверяет загруженный черновик и удобен с телефона.</a:t>
             </a:r>
             <a:endParaRPr lang="en-US" dirty="0"/>
           </a:p>
@@ -1250,7 +1250,7 @@
           <a:p>
             <a:r>
               <a:rPr lang="en-US" dirty="0"/>
-              <a:t>2:30–2:40 (10 с). Модель маленькая, поэтому всё, что можно посчитать, делает код: поиск, ссылки, согласующих по Матрице, сроки по календарю, шаблоны и проверку черновика. Модель только объясняет найденный пункт, и её текст проверяется. Всё open source и локально.</a:t>
+              <a:t>1:52–2:15. Как это устроено. Модель маленькая и локальная, поэтому всё, что можно посчитать, делает код: поиск, ссылки на пункты, согласующих, сроки, шаблоны и проверку черновика. Модель только объясняет найденный пункт простыми словами, и её текст проверяется: если в пояснении появится число или термин, которых нет в пункте, сотрудник увидит только цитату.</a:t>
             </a:r>
             <a:endParaRPr lang="en-US" dirty="0"/>
           </a:p>
@@ -1338,7 +1338,7 @@
           <a:p>
             <a:r>
               <a:rPr lang="en-US" dirty="0"/>
-              <a:t>2:40–2:50 (10 с). Для контура: всё на одной машине, модели локально, исходящих соединений нет — проверено на стенде. Стенд — 2 vCPU без GPU: в среднем 3,2 с на ответ. Для промышленного контура предлагаем SSO, SIEM и шифрование тома — это план, не сделано.</a:t>
+              <a:t>2:15–2:38. Решение рассчитано на закрытый контур: модели работают внутри, исходящих соединений нет, а доступ к закрытым пунктам ограничен прямо в запросе к индексу. Наш стенд — сервер с двумя ядрами без видеокарты, ответ в среднем за три секунды. Для промышленного контура предлагаем единый вход, журнал в системе безопасности и шифрование данных.</a:t>
             </a:r>
             <a:endParaRPr lang="en-US" dirty="0"/>
           </a:p>
@@ -1426,7 +1426,7 @@
           <a:p>
             <a:r>
               <a:rPr lang="en-US" dirty="0"/>
-              <a:t>2:50–3:00 (10 с). Итог: 40 из 40 нужных пунктов найдено, 9 из 9 честных отказов, утечек нет, живую речь понимает во всех 48 проверочных диалогах. Новая редакция или документ подключаются без правки кода, виджет — одной строкой. Спасибо! Готовы ответить на вопросы.</a:t>
+              <a:t>2:38–3:00. Мы проверили помощника на девяноста девяти вопросах: сорок из сорока нужных пунктов найдены, девять из девяти честных отказов и ни одной утечки закрытых пунктов. Новые редакции и документы подключаются без правки кода, а на портал виджет ставится одной строкой. Спасибо, готовы ответить на вопросы.</a:t>
             </a:r>
             <a:endParaRPr lang="en-US" dirty="0"/>
           </a:p>
@@ -8984,7 +8984,7 @@
                 <a:ea typeface="Arial" pitchFamily="34" charset="-122"/>
                 <a:cs typeface="Arial" pitchFamily="34" charset="-120"/>
               </a:rPr>
-              <a:t>Вживую: пять сценариев от вопроса до документа</a:t>
+              <a:t>Пять сценариев: от вопроса до документа</a:t>
             </a:r>
             <a:endParaRPr lang="en-US" sz="3200" dirty="0"/>
           </a:p>

--- a/docs/presentation/presentation.pptx
+++ b/docs/presentation/presentation.pptx
@@ -537,10 +537,13 @@
           <a:lstStyle/>
           <a:p>
             <a:r>
-              <a:rPr lang="en-US" dirty="0"/>
-              <a:t>0:00–0:17. Здравствуйте! Мы — команда «Опасные, но домашние». Мы сделали помощника по документообороту: сотрудник пишет задачу своими словами, а помощник находит нужный пункт Инструкции, объясняет его простыми словами и помогает сразу сделать документ. Всё работает локально, без внешних сервисов.</a:t>
-            </a:r>
-            <a:endParaRPr lang="en-US" dirty="0"/>
+              <a:t>0:00–0:15 · Александр</a:t>
+            </a:r>
+          </a:p>
+          <a:p>
+            <a:r>
+              <a:t>Здравствуйте! Мы — команда «Опасные, но домашние»: я Александр, со мной Даниил. Мы сделали помощника по документообороту: сотрудник пишет задачу своими словами, а помощник находит пункт Инструкции, объясняет его и помогает собрать документ.</a:t>
+            </a:r>
           </a:p>
         </p:txBody>
       </p:sp>
@@ -625,10 +628,18 @@
           <a:lstStyle/>
           <a:p>
             <a:r>
-              <a:rPr lang="en-US" dirty="0"/>
-              <a:t>0:17–0:35. Помощник уже работает на нашем стенде — его можно открыть по этому QR-коду с телефона. Спрашивать можно так, как пишут коллеге в мессенджер: например, «скока дней на согласавание приказа» или «если отправлю распоряжение на согласавание сегодня, когда будет готово?».</a:t>
-            </a:r>
-            <a:endParaRPr lang="en-US" dirty="0"/>
+              <a:t>0:15–0:27 · Александр</a:t>
+            </a:r>
+          </a:p>
+          <a:p>
+            <a:r>
+              <a:t>Помощник уже работает на стенде. Верхний QR-код открывает его с телефона, данные для входа — рядом, нижний — на код в GitHub. Даниил, покажи, что он умеет.</a:t>
+            </a:r>
+          </a:p>
+          <a:p>
+            <a:r>
+              <a:t>[Слайд 3, слово Даниилу.]</a:t>
+            </a:r>
           </a:p>
         </p:txBody>
       </p:sp>
@@ -713,10 +724,78 @@
           <a:lstStyle/>
           <a:p>
             <a:r>
-              <a:rPr lang="en-US" dirty="0"/>
-              <a:t>0:35–1:52. Вот пять сценариев, которые мы проверили на стенде. Первый — вопрос своими словами, с опечатками. На экране реальный ответ на вопрос «кагда регистрировать входящий документ»: помощник исправил опечатку, нашёл пункт пять шесть с релевантностью сто процентов и объяснил его простыми словами, а ниже дал дословную цитату и источник с редакцией и датой. Второй — вопрос, ответа на который в документах нет, например про зарплату. Помощник не выдумывает: он честно отказывает и подсказывает, куда обратиться. Третий — неполный вопрос «сколько дней на согласование?». Срок зависит от вида документа, поэтому помощник задаёт один уточняющий вопрос с кнопками. Распоряжение — три рабочих дня, а на короткое «а для приказа?» он отвечает с учётом контекста: десять. Четвёртый — рабочая задача: подготовить распоряжение о создании рабочей группы. Помощник подбирает модуль, называет согласующих по Матрице, задаёт вопросы по полям, проверяет формат ответов и выдаёт готовый файл .docx с чек-листом требований. Пятый — сроки датами: помощник берёт срок из Инструкции и считает крайнюю дату по производственному календарю, без выходных и праздников. Ещё он проверяет загруженный черновик и удобен с телефона.</a:t>
-            </a:r>
-            <a:endParaRPr lang="en-US" dirty="0"/>
+              <a:t>0:27–2:10 · Даниил, живой показ</a:t>
+            </a:r>
+          </a:p>
+          <a:p>
+            <a:r>
+              <a:t>Вот пять сценариев со слайда — покажу их вживую, на том же стенде.</a:t>
+            </a:r>
+          </a:p>
+          <a:p>
+            <a:r>
+              <a:t>[Переключиться в браузер с чатом. Ввести: «кагда регистрировать входящий документ».]</a:t>
+            </a:r>
+          </a:p>
+          <a:p>
+            <a:r>
+              <a:t>Пишу так, как пишут коллеге, — с ошибкой. Помощник исправил опечатку и нашёл пункт пять шесть. Сверху — ответ простыми словами, ниже — дословная цитата и источник: редакция, дата вступления в силу и процент релевантности.</a:t>
+            </a:r>
+          </a:p>
+          <a:p>
+            <a:r>
+              <a:t>[Ввести: «какая зарплата у главного специалиста?».]</a:t>
+            </a:r>
+          </a:p>
+          <a:p>
+            <a:r>
+              <a:t>Теперь вопрос, ответа на который в документах нет. Помощник не выдумывает: честно говорит, что информации недостаточно, и подсказывает, куда обратиться.</a:t>
+            </a:r>
+          </a:p>
+          <a:p>
+            <a:r>
+              <a:t>[Ввести: «сколько дней на согласование?», нажать кнопку «распоряжение», затем ввести: «а для приказа?».]</a:t>
+            </a:r>
+          </a:p>
+          <a:p>
+            <a:r>
+              <a:t>Неполный вопрос. Срок зависит от вида документа, поэтому помощник не угадывает, а уточняет кнопками. Распоряжение — три рабочих дня. Спрашиваю коротко: «а для приказа?» — контекст сохранён, десять дней.</a:t>
+            </a:r>
+          </a:p>
+          <a:p>
+            <a:r>
+              <a:t>[Ввести: «нужно подготовить распоряжение о создании рабочей группы».]</a:t>
+            </a:r>
+          </a:p>
+          <a:p>
+            <a:r>
+              <a:t>Рабочая задача. Помощник подобрал модуль документа, сразу назвал обязательных согласующих по Матрице и задаёт вопросы по полям — с подсказкой и примером.</a:t>
+            </a:r>
+          </a:p>
+          <a:p>
+            <a:r>
+              <a:t>[Вторая вкладка: диалог пройден заранее.]</a:t>
+            </a:r>
+          </a:p>
+          <a:p>
+            <a:r>
+              <a:t>Вопросов двенадцать, поэтому открываю диалог, пройденный заранее. Ответы проверяются: дату словами помощник не принял и попросил цифрами. В конце — готовый файл .docx и чек-лист со ссылками на пункты Инструкции.</a:t>
+            </a:r>
+          </a:p>
+          <a:p>
+            <a:r>
+              <a:t>[Первая вкладка. Ввести: «если отправлю распоряжение на согласавание сегодня когда будет готово?».]</a:t>
+            </a:r>
+          </a:p>
+          <a:p>
+            <a:r>
+              <a:t>И сроки датами. Срок помощник берёт из Инструкции, а дату считает по производственному календарю, без выходных и праздников. Вот крайняя дата и таблица: кто рассматривает и до какого числа. Александр, тебе слово.</a:t>
+            </a:r>
+          </a:p>
+          <a:p>
+            <a:r>
+              <a:t>[Вернуться в презентацию, слайд 4.]</a:t>
+            </a:r>
           </a:p>
         </p:txBody>
       </p:sp>
@@ -801,10 +880,13 @@
           <a:lstStyle/>
           <a:p>
             <a:r>
-              <a:rPr lang="en-US" dirty="0"/>
-              <a:t>1:52–2:15. Как это устроено. Модель маленькая и локальная, поэтому всё, что можно посчитать, делает код: поиск, ссылки на пункты, согласующих, сроки, шаблоны и проверку черновика. Модель только объясняет найденный пункт простыми словами, и её текст проверяется: если в пояснении появится число или термин, которых нет в пункте, сотрудник увидит только цитату.</a:t>
-            </a:r>
-            <a:endParaRPr lang="en-US" dirty="0"/>
+              <a:t>2:10–2:28 · Александр</a:t>
+            </a:r>
+          </a:p>
+          <a:p>
+            <a:r>
+              <a:t>Ищет и считает код: пункты, цитаты, согласующих, сроки и даты. Маленькая локальная модель объясняет найденный пункт простыми словами и помогает понять разговорный вопрос, а её текст проверяется: если появится число не из пункта, сотрудник увидит только цитату.</a:t>
+            </a:r>
           </a:p>
         </p:txBody>
       </p:sp>
@@ -889,10 +971,13 @@
           <a:lstStyle/>
           <a:p>
             <a:r>
-              <a:rPr lang="en-US" dirty="0"/>
-              <a:t>2:15–2:38. Решение рассчитано на закрытый контур: модели работают внутри, исходящих соединений нет, а доступ к закрытым пунктам ограничен прямо в запросе к индексу. Наш стенд — сервер с двумя ядрами без видеокарты, ответ в среднем за три секунды. Для промышленного контура предлагаем единый вход, журнал в системе безопасности и шифрование данных.</a:t>
-            </a:r>
-            <a:endParaRPr lang="en-US" dirty="0"/>
+              <a:t>2:28–2:43 · Александр</a:t>
+            </a:r>
+          </a:p>
+          <a:p>
+            <a:r>
+              <a:t>Решение рассчитано на закрытый контур: модели работают внутри, исходящих соединений нет, а закрытые пункты отсекаются прямо в запросе к индексу. Наш стенд — два ядра без видеокарты, ответ в среднем за три секунды.</a:t>
+            </a:r>
           </a:p>
         </p:txBody>
       </p:sp>
@@ -977,10 +1062,13 @@
           <a:lstStyle/>
           <a:p>
             <a:r>
-              <a:rPr lang="en-US" dirty="0"/>
-              <a:t>2:38–3:00. Мы проверили помощника на девяноста девяти вопросах: сорок из сорока нужных пунктов найдены, девять из девяти честных отказов и ни одной утечки закрытых пунктов. Новые редакции и документы подключаются без правки кода, а на портал виджет ставится одной строкой. Спасибо, готовы ответить на вопросы.</a:t>
-            </a:r>
-            <a:endParaRPr lang="en-US" dirty="0"/>
+              <a:t>2:43–3:00 · Александр</a:t>
+            </a:r>
+          </a:p>
+          <a:p>
+            <a:r>
+              <a:t>На девяноста девяти проверочных вопросах — сорок из сорока нужных пунктов, девять из девяти честных отказов и ни одной утечки закрытых пунктов. Новые редакции — без правки кода, виджет на портал — одной строкой. Спасибо! Готовы ответить на вопросы.</a:t>
+            </a:r>
           </a:p>
         </p:txBody>
       </p:sp>
@@ -2954,7 +3042,7 @@
                 <a:ea typeface="Arial" pitchFamily="34" charset="-122"/>
                 <a:cs typeface="Arial" pitchFamily="34" charset="-120"/>
               </a:rPr>
-              <a:t>1. «скока дней на согласавание…»</a:t>
+              <a:t>1. «кагда регистрировать…»</a:t>
             </a:r>
             <a:endParaRPr lang="en-US" sz="2000" dirty="0"/>
           </a:p>
